--- a/ADG/_실측판/04장/4장_Primary준비_ARCHIVELOG와FORCELOGGING과SRL.pptx
+++ b/ADG/_실측판/04장/4장_Primary준비_ARCHIVELOG와FORCELOGGING과SRL.pptx
@@ -5929,7 +5929,16 @@
                 </a:solidFill>
                 <a:latin typeface="맑은 고딕"/>
               </a:rPr>
-              <a:t>•  100% 가 되면 아카이브를 쓸 수 없어 **Primary 가 멈춘다**</a:t>
+              <a:t>•  100% 가 되면 아카이브를 쓸 수 없어 </a:t>
+            </a:r>
+            <a:r>
+              <a:rPr sz="1600" b="1">
+                <a:solidFill>
+                  <a:srgbClr val="222222"/>
+                </a:solidFill>
+                <a:latin typeface="맑은 고딕"/>
+              </a:rPr>
+              <a:t>Primary 가 멈춘다</a:t>
             </a:r>
           </a:p>
           <a:p>
@@ -5977,7 +5986,25 @@
                 </a:solidFill>
                 <a:latin typeface="맑은 고딕"/>
               </a:rPr>
-              <a:t>•  ★ 이 경로는 **보호 모드와 무관하게** 작동한다 (Maximum Performance 도 예외 아님)</a:t>
+              <a:t>•  ★ 이 경로는 </a:t>
+            </a:r>
+            <a:r>
+              <a:rPr sz="1600" b="1">
+                <a:solidFill>
+                  <a:srgbClr val="222222"/>
+                </a:solidFill>
+                <a:latin typeface="맑은 고딕"/>
+              </a:rPr>
+              <a:t>보호 모드와 무관하게</a:t>
+            </a:r>
+            <a:r>
+              <a:rPr sz="1600" b="0">
+                <a:solidFill>
+                  <a:srgbClr val="222222"/>
+                </a:solidFill>
+                <a:latin typeface="맑은 고딕"/>
+              </a:rPr>
+              <a:t> 작동한다 (Maximum Performance 도 예외 아님)</a:t>
             </a:r>
           </a:p>
         </p:txBody>
@@ -7525,7 +7552,16 @@
                 </a:solidFill>
                 <a:latin typeface="맑은 고딕"/>
               </a:rPr>
-              <a:t>•  Data Guard 구성에서는 **데이터베이스 수준을 반드시 켠다**</a:t>
+              <a:t>•  Data Guard 구성에서는 </a:t>
+            </a:r>
+            <a:r>
+              <a:rPr sz="1600" b="1">
+                <a:solidFill>
+                  <a:srgbClr val="222222"/>
+                </a:solidFill>
+                <a:latin typeface="맑은 고딕"/>
+              </a:rPr>
+              <a:t>데이터베이스 수준을 반드시 켠다</a:t>
             </a:r>
           </a:p>
           <a:p>
@@ -8699,7 +8735,25 @@
                 </a:solidFill>
                 <a:latin typeface="맑은 고딕"/>
               </a:rPr>
-              <a:t>•  그러나 리두를 받을 때 **건너뛴다** — 만들어도 없는 것과 같다</a:t>
+              <a:t>•  그러나 리두를 받을 때 </a:t>
+            </a:r>
+            <a:r>
+              <a:rPr sz="1700" b="1">
+                <a:solidFill>
+                  <a:srgbClr val="222222"/>
+                </a:solidFill>
+                <a:latin typeface="맑은 고딕"/>
+              </a:rPr>
+              <a:t>건너뛴다</a:t>
+            </a:r>
+            <a:r>
+              <a:rPr sz="1700" b="0">
+                <a:solidFill>
+                  <a:srgbClr val="222222"/>
+                </a:solidFill>
+                <a:latin typeface="맑은 고딕"/>
+              </a:rPr>
+              <a:t> — 만들어도 없는 것과 같다</a:t>
             </a:r>
           </a:p>
           <a:p>
@@ -9185,7 +9239,16 @@
                 </a:solidFill>
                 <a:latin typeface="맑은 고딕"/>
               </a:rPr>
-              <a:t>•  ORA-01184 : 여러 그룹을 한 문장으로 추가 중 하나가 중복 → **전체가 실패**</a:t>
+              <a:t>•  ORA-01184 : 여러 그룹을 한 문장으로 추가 중 하나가 중복 → </a:t>
+            </a:r>
+            <a:r>
+              <a:rPr sz="1700" b="1">
+                <a:solidFill>
+                  <a:srgbClr val="222222"/>
+                </a:solidFill>
+                <a:latin typeface="맑은 고딕"/>
+              </a:rPr>
+              <a:t>전체가 실패</a:t>
             </a:r>
           </a:p>
           <a:p>
@@ -9380,7 +9443,16 @@
                 </a:solidFill>
                 <a:latin typeface="맑은 고딕"/>
               </a:rPr>
-              <a:t>•  SRL 1개만 남긴 상태에서 USING CURRENT LOGFILE 적용 → **성공했다**</a:t>
+              <a:t>•  SRL 1개만 남긴 상태에서 USING CURRENT LOGFILE 적용 → </a:t>
+            </a:r>
+            <a:r>
+              <a:rPr sz="1700" b="1">
+                <a:solidFill>
+                  <a:srgbClr val="222222"/>
+                </a:solidFill>
+                <a:latin typeface="맑은 고딕"/>
+              </a:rPr>
+              <a:t>성공했다</a:t>
             </a:r>
           </a:p>
           <a:p>
@@ -9910,7 +9982,16 @@
                 </a:solidFill>
                 <a:latin typeface="맑은 고딕"/>
               </a:rPr>
-              <a:t>•  DATA AVAILABILITY : Standby 가 받을 때까지 적재가 **기다린다**</a:t>
+              <a:t>•  DATA AVAILABILITY : Standby 가 받을 때까지 적재가 </a:t>
+            </a:r>
+            <a:r>
+              <a:rPr sz="1700" b="1">
+                <a:solidFill>
+                  <a:srgbClr val="222222"/>
+                </a:solidFill>
+                <a:latin typeface="맑은 고딕"/>
+              </a:rPr>
+              <a:t>기다린다</a:t>
             </a:r>
           </a:p>
           <a:p>
@@ -10593,7 +10674,25 @@
                 </a:solidFill>
                 <a:latin typeface="맑은 고딕"/>
               </a:rPr>
-              <a:t>•  ★ 두 STANDBY NOLOGGING 모드는 **직접 경로 적재에만 적용된다**. 일반 DML 은 그대로</a:t>
+              <a:t>•  ★ 두 STANDBY NOLOGGING 모드는 </a:t>
+            </a:r>
+            <a:r>
+              <a:rPr sz="1600" b="1">
+                <a:solidFill>
+                  <a:srgbClr val="222222"/>
+                </a:solidFill>
+                <a:latin typeface="맑은 고딕"/>
+              </a:rPr>
+              <a:t>직접 경로 적재에만 적용된다</a:t>
+            </a:r>
+            <a:r>
+              <a:rPr sz="1600" b="0">
+                <a:solidFill>
+                  <a:srgbClr val="222222"/>
+                </a:solidFill>
+                <a:latin typeface="맑은 고딕"/>
+              </a:rPr>
+              <a:t>. 일반 DML 은 그대로</a:t>
             </a:r>
           </a:p>
         </p:txBody>
